--- a/week-03/presentations/ppts/day-05-prd-review.pptx
+++ b/week-03/presentations/ppts/day-05-prd-review.pptx
@@ -6226,6 +6226,44 @@
           </a:p>
         </p:txBody>
       </p:sp>
+      <p:sp>
+        <p:nvSpPr>
+          <p:cNvPr id="3" name="Content Placeholder 2"/>
+          <p:cNvSpPr>
+            <a:spLocks noGrp="1"/>
+          </p:cNvSpPr>
+          <p:nvPr>
+            <p:ph idx="1"/>
+          </p:nvPr>
+        </p:nvSpPr>
+        <p:spPr/>
+        <p:txBody>
+          <a:bodyPr/>
+          <a:lstStyle/>
+          <a:p>
+            <a:pPr lvl="0" indent="0">
+              <a:buNone/>
+            </a:pPr>
+            <a:r>
+              <a:rPr>
+                <a:latin typeface="Courier"/>
+              </a:rPr>
+              <a:t>## Friday review-resolution log
+**Reviewers (AM):** Triad B, Triad C
+**Total scores:** B = 3.1 / C = 2.8 → addressed below
+### Adopted
+- B/Finding 2: §6 AC #4 was untestable. Rewrote with explicit observable.
+- C/Finding 1: §7 missing Compliance NFR. Added retention + audit-trail.
+- B/Finding 5: §9 risk "tech adoption" had no mitigation. Added toggle.
+### Deferred
+- C/Finding 3: Multi-shop manager view. DEFERRED to §11 + ticket.
+### Pushed back
+- B/Finding 4: Reviewer suggested splitting AC #2; declined because the
+"ands" describe one observable state. Reasoning preserved here.</a:t>
+            </a:r>
+          </a:p>
+        </p:txBody>
+      </p:sp>
     </p:spTree>
   </p:cSld>
 </p:sld>
@@ -8093,15 +8131,6 @@
             </a:pPr>
             <a:r>
               <a:rPr/>
-              <a:t>“NFRs feel light”</a:t>
-            </a:r>
-          </a:p>
-          <a:p>
-            <a:pPr lvl="0" indent="0" marL="0">
-              <a:buNone/>
-            </a:pPr>
-            <a:r>
-              <a:rPr/>
               <a:t>No section citations</a:t>
             </a:r>
           </a:p>
@@ -8129,25 +8158,16 @@
             </a:pPr>
             <a:r>
               <a:rPr/>
-              <a:t>“§2 doesn’t say small-shop or large-shop dispatchers; that changes scope”</a:t>
-            </a:r>
-          </a:p>
-          <a:p>
-            <a:pPr lvl="0" indent="0" marL="0">
-              <a:buNone/>
-            </a:pPr>
-            <a:r>
-              <a:rPr/>
-              <a:t>“AC #4: ‘system handles errors gracefully’ — propose: ‘Given timeout &gt;5s, when user retries, then queued for offline submit’”</a:t>
-            </a:r>
-          </a:p>
-          <a:p>
-            <a:pPr lvl="0" indent="0" marL="0">
-              <a:buNone/>
-            </a:pPr>
-            <a:r>
-              <a:rPr/>
-              <a:t>“NFR-7 has no Compliance entry; SOC 2 audit-trail missing”</a:t>
+              <a:t>“§2 doesn’t say small- or large-shop dispatchers — changes scope”</a:t>
+            </a:r>
+          </a:p>
+          <a:p>
+            <a:pPr lvl="0" indent="0" marL="0">
+              <a:buNone/>
+            </a:pPr>
+            <a:r>
+              <a:rPr/>
+              <a:t>“AC #4: ‘handles errors gracefully’ → ‘Given timeout &gt;5s, when user retries, then queued for offline submit’”</a:t>
             </a:r>
           </a:p>
           <a:p>
@@ -8240,6 +8260,31 @@
         <p:txBody>
           <a:bodyPr/>
           <a:lstStyle/>
+          <a:p>
+            <a:pPr lvl="0" indent="0">
+              <a:buNone/>
+            </a:pPr>
+            <a:r>
+              <a:rPr>
+                <a:latin typeface="Courier"/>
+              </a:rPr>
+              <a:t># Review of PRD: &lt;feature name&gt;
+**Reviewers:** &lt;reviewer triad&gt;
+**PRD authors:** &lt;author triad&gt;
+## Scores (0–4 per dimension)
+| Dimension | Score | One-line rationale |
+| ... |
+**Total:** [weighted sum, out of 4.0]
+## Top 3 strengths (specific)
+1. ...
+## Top 5 specific findings
+1. § ___ — &lt;label&gt;
+- What we observed:
+- Why it matters:
+- Suggested fix:
+## Open questions for the author triad</a:t>
+            </a:r>
+          </a:p>
           <a:p>
             <a:pPr lvl="0" indent="0" marL="0">
               <a:buNone/>

--- a/week-03/presentations/ppts/day-05-prd-review.pptx
+++ b/week-03/presentations/ppts/day-05-prd-review.pptx
@@ -5460,25 +5460,25 @@
             </a:pPr>
             <a:r>
               <a:rPr/>
-              <a:t>0–10 min: read §§1–5; score Problem clarity + Strategy linkage</a:t>
-            </a:r>
-          </a:p>
-          <a:p>
-            <a:pPr lvl="0" indent="0" marL="0">
-              <a:buNone/>
-            </a:pPr>
-            <a:r>
-              <a:rPr/>
-              <a:t>10–35 min: read §§6–7; score AC + NFRs</a:t>
-            </a:r>
-          </a:p>
-          <a:p>
-            <a:pPr lvl="0" indent="0" marL="0">
-              <a:buNone/>
-            </a:pPr>
-            <a:r>
-              <a:rPr/>
-              <a:t>35–55 min: read §§8–11; score Risk honesty</a:t>
+              <a:t>0–10 min: read Sections 1–5; score Problem clarity + Strategy linkage</a:t>
+            </a:r>
+          </a:p>
+          <a:p>
+            <a:pPr lvl="0" indent="0" marL="0">
+              <a:buNone/>
+            </a:pPr>
+            <a:r>
+              <a:rPr/>
+              <a:t>10–35 min: read Sections 6–7; score AC + NFRs</a:t>
+            </a:r>
+          </a:p>
+          <a:p>
+            <a:pPr lvl="0" indent="0" marL="0">
+              <a:buNone/>
+            </a:pPr>
+            <a:r>
+              <a:rPr/>
+              <a:t>35–55 min: read Sections 8–11; score Risk honesty</a:t>
             </a:r>
           </a:p>
           <a:p>
@@ -6252,11 +6252,11 @@
 **Reviewers (AM):** Triad B, Triad C
 **Total scores:** B = 3.1 / C = 2.8 → addressed below
 ### Adopted
-- B/Finding 2: §6 AC #4 was untestable. Rewrote with explicit observable.
-- C/Finding 1: §7 missing Compliance NFR. Added retention + audit-trail.
-- B/Finding 5: §9 risk "tech adoption" had no mitigation. Added toggle.
+- B/Finding 2: Section 6 AC #4 was untestable. Rewrote with explicit observable.
+- C/Finding 1: Section 7 missing Compliance NFR. Added retention + audit-trail.
+- B/Finding 5: Section 9 risk "tech adoption" had no mitigation. Added toggle.
 ### Deferred
-- C/Finding 3: Multi-shop manager view. DEFERRED to §11 + ticket.
+- C/Finding 3: Multi-shop manager view. DEFERRED to Section 11 + ticket.
 ### Pushed back
 - B/Finding 4: Reviewer suggested splitting AC #2; declined because the
 "ands" describe one observable state. Reasoning preserved here.</a:t>
@@ -8113,7 +8113,7 @@
             </a:pPr>
             <a:r>
               <a:rPr/>
-              <a:t>“§2 is unclear”</a:t>
+              <a:t>“Section 2 is unclear”</a:t>
             </a:r>
           </a:p>
           <a:p>
@@ -8158,7 +8158,7 @@
             </a:pPr>
             <a:r>
               <a:rPr/>
-              <a:t>“§2 doesn’t say small- or large-shop dispatchers — changes scope”</a:t>
+              <a:t>“Section 2 doesn’t say small- or large-shop dispatchers — changes scope”</a:t>
             </a:r>
           </a:p>
           <a:p>
@@ -8278,7 +8278,7 @@
 ## Top 3 strengths (specific)
 1. ...
 ## Top 5 specific findings
-1. § ___ — &lt;label&gt;
+1. Section ___ — &lt;label&gt;
 - What we observed:
 - Why it matters:
 - Suggested fix:

--- a/week-03/presentations/ppts/day-05-prd-review.pptx
+++ b/week-03/presentations/ppts/day-05-prd-review.pptx
@@ -5469,7 +5469,7 @@
             </a:pPr>
             <a:r>
               <a:rPr/>
-              <a:t>10–35 min: read Sections 6–7; score AC + NFRs</a:t>
+              <a:t>10–35 min: read Sections 6–7; score AC + non-functional requirements (NFRs)</a:t>
             </a:r>
           </a:p>
           <a:p>
@@ -7237,7 +7237,7 @@
             </a:pPr>
             <a:r>
               <a:rPr/>
-              <a:t>Ship the mini-capstone deliverable: signed-off PRD + review trail</a:t>
+              <a:t>Ship the mini-capstone deliverable: signed-off Product Requirements Document (PRD) + review trail</a:t>
             </a:r>
           </a:p>
         </p:txBody>
@@ -7843,6 +7843,15 @@
             </a:pPr>
             <a:r>
               <a:rPr/>
+              <a:t>Score each dimension 0–4; strategy linkage checks goals against your North Star (NS) and key performance indicators (KPIs):</a:t>
+            </a:r>
+          </a:p>
+          <a:p>
+            <a:pPr lvl="0" indent="0" marL="0">
+              <a:buNone/>
+            </a:pPr>
+            <a:r>
+              <a:rPr/>
               <a:t>Dimension</a:t>
             </a:r>
           </a:p>
@@ -8122,7 +8131,7 @@
             </a:pPr>
             <a:r>
               <a:rPr/>
-              <a:t>“AC could be more specific”</a:t>
+              <a:t>“acceptance criteria (AC) could be more specific”</a:t>
             </a:r>
           </a:p>
           <a:p>

--- a/week-03/presentations/ppts/day-05-prd-review.pptx
+++ b/week-03/presentations/ppts/day-05-prd-review.pptx
@@ -1203,7 +1203,7 @@
             </a:pPr>
             <a:r>
               <a:rPr/>
-              <a:t>Don’t let triads spend 60 min on prose. Coherence first.</a:t>
+              <a:t>Don’t let quads spend 60 min on prose. Coherence first.</a:t>
             </a:r>
           </a:p>
         </p:txBody>
@@ -1285,7 +1285,7 @@
             </a:pPr>
             <a:r>
               <a:rPr/>
-              <a:t>A second pair of eyes on the revised PRD catches gaps the author triad still can’t see. Final score becomes the Week 3 capstone artifact.</a:t>
+              <a:t>A second pair of eyes on the revised PRD catches gaps the author quad still can’t see. Final score becomes the Week 3 capstone artifact.</a:t>
             </a:r>
           </a:p>
         </p:txBody>
@@ -1695,7 +1695,7 @@
             </a:pPr>
             <a:r>
               <a:rPr/>
-              <a:t>Public read-aloud: facilitator names one strength of each triad’s PRD. Surfaces the cohort’s growth edge for Week 4.</a:t>
+              <a:t>Public read-aloud: facilitator names one strength of each quad’s PRD. Surfaces the cohort’s growth edge for Week 4.</a:t>
             </a:r>
           </a:p>
         </p:txBody>
@@ -2351,7 +2351,7 @@
             </a:pPr>
             <a:r>
               <a:rPr/>
-              <a:t>No coordination between reviewer triads. The author triad benefits from two independent perspectives.</a:t>
+              <a:t>No coordination between reviewer quads. The author quad benefits from two independent perspectives.</a:t>
             </a:r>
           </a:p>
         </p:txBody>
@@ -5451,7 +5451,7 @@
             </a:pPr>
             <a:r>
               <a:rPr b="1"/>
-              <a:t>Two reviewing triads per PRD • 90 minutes</a:t>
+              <a:t>Two reviewing quads per PRD • 90 minutes</a:t>
             </a:r>
           </a:p>
           <a:p>
@@ -5496,7 +5496,7 @@
             </a:pPr>
             <a:r>
               <a:rPr/>
-              <a:t>75–90 min: refine + submit (no coordination with the other reviewer triad)</a:t>
+              <a:t>75–90 min: refine + submit (no coordination with the other reviewer quad)</a:t>
             </a:r>
           </a:p>
           <a:p>
@@ -5652,16 +5652,16 @@
             </a:pPr>
             <a:r>
               <a:rPr/>
-              <a:t>5 min: each reviewing triad gives a 2-min spoken summary</a:t>
-            </a:r>
-          </a:p>
-          <a:p>
-            <a:pPr lvl="0" indent="0" marL="0">
-              <a:buNone/>
-            </a:pPr>
-            <a:r>
-              <a:rPr/>
-              <a:t>20 min: author triad asks — “Walk us through finding #3”; “Which AC was worst?”</a:t>
+              <a:t>5 min: each reviewing quad gives a 2-min spoken summary</a:t>
+            </a:r>
+          </a:p>
+          <a:p>
+            <a:pPr lvl="0" indent="0" marL="0">
+              <a:buNone/>
+            </a:pPr>
+            <a:r>
+              <a:rPr/>
+              <a:t>20 min: author quad asks — “Walk us through finding #3”; “Which AC was worst?”</a:t>
             </a:r>
           </a:p>
           <a:p>
@@ -5679,7 +5679,7 @@
             </a:pPr>
             <a:r>
               <a:rPr/>
-              <a:t>10 min: author triad summarizes what they heard — adopt / defer / push back</a:t>
+              <a:t>10 min: author quad summarizes what they heard — adopt / defer / push back</a:t>
             </a:r>
           </a:p>
           <a:p>
@@ -5928,7 +5928,7 @@
             </a:pPr>
             <a:r>
               <a:rPr b="1"/>
-              <a:t>Triad-of-three (author + 2 reviewing triads) • 60 minutes</a:t>
+              <a:t>Three quads (author + 2 reviewing quads) • 60 minutes</a:t>
             </a:r>
           </a:p>
           <a:p>
@@ -5946,7 +5946,7 @@
             </a:pPr>
             <a:r>
               <a:rPr/>
-              <a:t>20 min: author triad asks</a:t>
+              <a:t>20 min: author quad asks</a:t>
             </a:r>
           </a:p>
           <a:p>
@@ -5964,7 +5964,7 @@
             </a:pPr>
             <a:r>
               <a:rPr/>
-              <a:t>10 min: author triad summarizes what they heard</a:t>
+              <a:t>10 min: author quad summarizes what they heard</a:t>
             </a:r>
           </a:p>
           <a:p>
@@ -6174,7 +6174,7 @@
             </a:pPr>
             <a:r>
               <a:rPr/>
-              <a:t>The trust signal: Push-back entries with reasoning. Show the triad thought, not just complied.</a:t>
+              <a:t>The trust signal: Push-back entries with reasoning. Show the quad thought, not just complied.</a:t>
             </a:r>
           </a:p>
         </p:txBody>
@@ -6249,7 +6249,7 @@
                 <a:latin typeface="Courier"/>
               </a:rPr>
               <a:t>## Friday review-resolution log
-**Reviewers (AM):** Triad B, Triad C
+**Reviewers (AM):** Quad B, Quad C
 **Total scores:** B = 3.1 / C = 2.8 → addressed below
 ### Adopted
 - B/Finding 2: Section 6 AC #4 was untestable. Rewrote with explicit observable.
@@ -6334,7 +6334,7 @@
             </a:pPr>
             <a:r>
               <a:rPr b="1"/>
-              <a:t>Triads • 90 minutes</a:t>
+              <a:t>Quads • 90 minutes</a:t>
             </a:r>
           </a:p>
           <a:p>
@@ -6838,7 +6838,7 @@
             </a:pPr>
             <a:r>
               <a:rPr b="1"/>
-              <a:t>Single reviewing triad • 60 minutes</a:t>
+              <a:t>Single reviewing quad • 60 minutes</a:t>
             </a:r>
           </a:p>
           <a:p>
@@ -6955,7 +6955,7 @@
             </a:pPr>
             <a:r>
               <a:rPr/>
-              <a:t>11-section technical PRD per triad</a:t>
+              <a:t>11-section technical PRD per quad</a:t>
             </a:r>
           </a:p>
           <a:p>
@@ -7696,7 +7696,7 @@
             </a:pPr>
             <a:r>
               <a:rPr/>
-              <a:t>Each triad has 3 reading roles today: primary ×2 in AM, secondary ×1 in PM. Plus owning your own PRD throughout.</a:t>
+              <a:t>Each quad has 3 reading roles today: primary ×2 in AM, secondary ×1 in PM. Plus owning your own PRD throughout.</a:t>
             </a:r>
           </a:p>
         </p:txBody>
@@ -8278,8 +8278,8 @@
                 <a:latin typeface="Courier"/>
               </a:rPr>
               <a:t># Review of PRD: &lt;feature name&gt;
-**Reviewers:** &lt;reviewer triad&gt;
-**PRD authors:** &lt;author triad&gt;
+**Reviewers:** &lt;reviewer quad&gt;
+**PRD authors:** &lt;author quad&gt;
 ## Scores (0–4 per dimension)
 | Dimension | Score | One-line rationale |
 | ... |
@@ -8291,7 +8291,7 @@
 - What we observed:
 - Why it matters:
 - Suggested fix:
-## Open questions for the author triad</a:t>
+## Open questions for the author quad</a:t>
             </a:r>
           </a:p>
           <a:p>
